--- a/docs/concept/TEA-concept-overview.pptx
+++ b/docs/concept/TEA-concept-overview.pptx
@@ -1044,7 +1044,7 @@
           <a:p>
             <a:r>
               <a:rPr lang="en-US" dirty="0"/>
-              <a:t>Close by naming the next decision: confirming the 14 amended rules, then reviewing the query wording in Rule_Messages.</a:t>
+              <a:t>Close by naming the next decision: reviewing the query wording in Rule_Messages. Nothing freezes until that is accepted.</a:t>
             </a:r>
             <a:endParaRPr lang="en-US" dirty="0"/>
           </a:p>
@@ -2418,7 +2418,7 @@
                 <a:ea typeface="Courier New" pitchFamily="34" charset="-122"/>
                 <a:cs typeface="Courier New" pitchFamily="34" charset="-120"/>
               </a:rPr>
-              <a:t>Concept overview  ·  derived from TEA-PLAN-001 v1.0.0 and TEA-SPEC-001 v1.1.1</a:t>
+              <a:t>Concept overview  ·  derived from TEA-PLAN-001 v1.0.0 and TEA-SPEC-001 v1.2.0</a:t>
             </a:r>
             <a:endParaRPr lang="en-US" sz="900" dirty="0"/>
           </a:p>
@@ -10737,7 +10737,7 @@
                 <a:ea typeface="Cambria" pitchFamily="34" charset="-122"/>
                 <a:cs typeface="Cambria" pitchFamily="34" charset="-120"/>
               </a:rPr>
-              <a:t>Step 2, review round 2</a:t>
+              <a:t>Step 2, part-done</a:t>
             </a:r>
             <a:endParaRPr lang="en-US" sz="3800" dirty="0"/>
           </a:p>
@@ -10803,7 +10803,7 @@
                 <a:ea typeface="Courier New" pitchFamily="34" charset="-122"/>
                 <a:cs typeface="Courier New" pitchFamily="34" charset="-120"/>
               </a:rPr>
-              <a:t>ROUND 1 COMPLETE</a:t>
+              <a:t>RULES SETTLED</a:t>
             </a:r>
             <a:endParaRPr lang="en-US" sz="900" dirty="0"/>
           </a:p>
@@ -10845,7 +10845,7 @@
                 <a:ea typeface="Calibri" pitchFamily="34" charset="-122"/>
                 <a:cs typeface="Calibri" pitchFamily="34" charset="-120"/>
               </a:rPr>
-              <a:t>85 rules dispositioned - 70 accept, 14 discuss, 1 reject. Every item resolved.</a:t>
+              <a:t>All 85 rules dispositioned over two rounds. Logic, severities and confidence base rates confirmed; 2 rules retired.</a:t>
             </a:r>
             <a:endParaRPr lang="en-US" sz="1200" dirty="0"/>
           </a:p>
@@ -10953,7 +10953,7 @@
                 <a:ea typeface="Calibri" pitchFamily="34" charset="-122"/>
                 <a:cs typeface="Calibri" pitchFamily="34" charset="-120"/>
               </a:rPr>
-              <a:t>The 14 amended rules need confirming, and Rule_Messages has not been reviewed yet.</a:t>
+              <a:t>Rule_Messages - the query wording a site actually reads. Reviewed on its own, by people who talk to sites.</a:t>
             </a:r>
             <a:endParaRPr lang="en-US" sz="1200" dirty="0"/>
           </a:p>
@@ -11061,7 +11061,7 @@
                 <a:ea typeface="Calibri" pitchFamily="34" charset="-122"/>
                 <a:cs typeface="Calibri" pitchFamily="34" charset="-120"/>
               </a:rPr>
-              <a:t>Rule pack freezes and Step 3 begins - prototype output on a curated dummy dataset.</a:t>
+              <a:t>The rule pack freezes and Step 3 begins: prototype output on a curated dummy dataset.</a:t>
             </a:r>
             <a:endParaRPr lang="en-US" sz="1200" dirty="0"/>
           </a:p>
@@ -14976,7 +14976,7 @@
                 <a:ea typeface="Calibri" pitchFamily="34" charset="-122"/>
                 <a:cs typeface="Calibri" pitchFamily="34" charset="-120"/>
               </a:rPr>
-              <a:t>Review round 2</a:t>
+              <a:t>Rules done; wording next</a:t>
             </a:r>
             <a:endParaRPr lang="en-US" sz="1000" dirty="0"/>
           </a:p>

--- a/docs/concept/TEA-concept-overview.pptx
+++ b/docs/concept/TEA-concept-overview.pptx
@@ -1044,7 +1044,7 @@
           <a:p>
             <a:r>
               <a:rPr lang="en-US" dirty="0"/>
-              <a:t>Close by naming the next decision: reviewing the query wording in Rule_Messages. Nothing freezes until that is accepted.</a:t>
+              <a:t>The approval was a reasonableness review, not line-by-line. That is workable because Step 3 confirms the detail by evidence - the golden dataset tests all 83 live rules against known expected findings.</a:t>
             </a:r>
             <a:endParaRPr lang="en-US" dirty="0"/>
           </a:p>
@@ -2418,7 +2418,7 @@
                 <a:ea typeface="Courier New" pitchFamily="34" charset="-122"/>
                 <a:cs typeface="Courier New" pitchFamily="34" charset="-120"/>
               </a:rPr>
-              <a:t>Concept overview  ·  derived from TEA-PLAN-001 v1.0.0 and TEA-SPEC-001 v1.2.0</a:t>
+              <a:t>Concept overview  ·  derived from TEA-PLAN-001 v1.0.0 and TEA-SPEC-001 v2.0.0</a:t>
             </a:r>
             <a:endParaRPr lang="en-US" sz="900" dirty="0"/>
           </a:p>
@@ -10737,7 +10737,7 @@
                 <a:ea typeface="Cambria" pitchFamily="34" charset="-122"/>
                 <a:cs typeface="Cambria" pitchFamily="34" charset="-120"/>
               </a:rPr>
-              <a:t>Step 2, part-done</a:t>
+              <a:t>Step 2 closed. Step 3 next.</a:t>
             </a:r>
             <a:endParaRPr lang="en-US" sz="3800" dirty="0"/>
           </a:p>
@@ -10803,7 +10803,7 @@
                 <a:ea typeface="Courier New" pitchFamily="34" charset="-122"/>
                 <a:cs typeface="Courier New" pitchFamily="34" charset="-120"/>
               </a:rPr>
-              <a:t>RULES SETTLED</a:t>
+              <a:t>APPROVED 21 AUG</a:t>
             </a:r>
             <a:endParaRPr lang="en-US" sz="900" dirty="0"/>
           </a:p>
@@ -10845,7 +10845,7 @@
                 <a:ea typeface="Calibri" pitchFamily="34" charset="-122"/>
                 <a:cs typeface="Calibri" pitchFamily="34" charset="-120"/>
               </a:rPr>
-              <a:t>All 85 rules dispositioned over two rounds. Logic, severities and confidence base rates confirmed; 2 rules retired.</a:t>
+              <a:t>Three review rounds, then a reviewer-lens pass that changed 27 rules. Rule pack frozen at 2.0.0 - changes now need change control.</a:t>
             </a:r>
             <a:endParaRPr lang="en-US" sz="1200" dirty="0"/>
           </a:p>
@@ -10911,7 +10911,7 @@
                 <a:ea typeface="Courier New" pitchFamily="34" charset="-122"/>
                 <a:cs typeface="Courier New" pitchFamily="34" charset="-120"/>
               </a:rPr>
-              <a:t>OPEN NOW</a:t>
+              <a:t>BLOCKED ON</a:t>
             </a:r>
             <a:endParaRPr lang="en-US" sz="900" dirty="0"/>
           </a:p>
@@ -10953,7 +10953,7 @@
                 <a:ea typeface="Calibri" pitchFamily="34" charset="-122"/>
                 <a:cs typeface="Calibri" pitchFamily="34" charset="-120"/>
               </a:rPr>
-              <a:t>Rule_Messages - the query wording a site actually reads. Reviewed on its own, by people who talk to sites.</a:t>
+              <a:t>Choosing the pilot study. Step 3 cannot start without it: it decides the golden dataset and the UAT study.</a:t>
             </a:r>
             <a:endParaRPr lang="en-US" sz="1200" dirty="0"/>
           </a:p>
@@ -11019,7 +11019,7 @@
                 <a:ea typeface="Courier New" pitchFamily="34" charset="-122"/>
                 <a:cs typeface="Courier New" pitchFamily="34" charset="-120"/>
               </a:rPr>
-              <a:t>THEN</a:t>
+              <a:t>WATCH AT STEP 3</a:t>
             </a:r>
             <a:endParaRPr lang="en-US" sz="900" dirty="0"/>
           </a:p>
@@ -11061,7 +11061,7 @@
                 <a:ea typeface="Calibri" pitchFamily="34" charset="-122"/>
                 <a:cs typeface="Calibri" pitchFamily="34" charset="-120"/>
               </a:rPr>
-              <a:t>The rule pack freezes and Step 3 begins: prototype output on a curated dummy dataset.</a:t>
+              <a:t>The 8 rules whose logic changed last have no test history, and 27 confidence rates are still estimates rather than measurements.</a:t>
             </a:r>
             <a:endParaRPr lang="en-US" sz="1200" dirty="0"/>
           </a:p>
@@ -14806,6 +14806,224 @@
             </a:avLst>
           </a:prstGeom>
           <a:solidFill>
+            <a:srgbClr val="1D4A3A"/>
+          </a:solidFill>
+          <a:ln w="12700">
+            <a:solidFill>
+              <a:srgbClr val="1D4A3A"/>
+            </a:solidFill>
+            <a:prstDash val="solid"/>
+          </a:ln>
+          <a:effectLst>
+            <a:outerShdw sx="100000" sy="100000" kx="0" ky="0" algn="bl" rotWithShape="0" blurRad="101600" dist="508" dir="5400000">
+              <a:srgbClr val="16201C">
+                <a:alpha val="10000"/>
+              </a:srgbClr>
+            </a:outerShdw>
+          </a:effectLst>
+        </p:spPr>
+      </p:sp>
+      <p:sp>
+        <p:nvSpPr>
+          <p:cNvPr id="11" name="Text 9"/>
+          <p:cNvSpPr/>
+          <p:nvPr/>
+        </p:nvSpPr>
+        <p:spPr>
+          <a:xfrm>
+            <a:off x="2542032" y="1975104"/>
+            <a:ext cx="1408176" cy="219456"/>
+          </a:xfrm>
+          <a:prstGeom prst="rect">
+            <a:avLst/>
+          </a:prstGeom>
+          <a:noFill/>
+          <a:ln/>
+        </p:spPr>
+        <p:txBody>
+          <a:bodyPr wrap="square" lIns="0" tIns="0" rIns="0" bIns="0" rtlCol="0" anchor="ctr"/>
+          <a:lstStyle/>
+          <a:p>
+            <a:pPr indent="0" marL="0">
+              <a:buNone/>
+            </a:pPr>
+            <a:r>
+              <a:rPr lang="en-US" sz="900" b="1" dirty="0">
+                <a:solidFill>
+                  <a:srgbClr val="8FC4A9"/>
+                </a:solidFill>
+                <a:latin typeface="Courier New" pitchFamily="34" charset="0"/>
+                <a:ea typeface="Courier New" pitchFamily="34" charset="-122"/>
+                <a:cs typeface="Courier New" pitchFamily="34" charset="-120"/>
+              </a:rPr>
+              <a:t>STEP 2</a:t>
+            </a:r>
+            <a:endParaRPr lang="en-US" sz="900" dirty="0"/>
+          </a:p>
+        </p:txBody>
+      </p:sp>
+      <p:sp>
+        <p:nvSpPr>
+          <p:cNvPr id="12" name="Text 10"/>
+          <p:cNvSpPr/>
+          <p:nvPr/>
+        </p:nvSpPr>
+        <p:spPr>
+          <a:xfrm>
+            <a:off x="2542032" y="2249424"/>
+            <a:ext cx="1408176" cy="548640"/>
+          </a:xfrm>
+          <a:prstGeom prst="rect">
+            <a:avLst/>
+          </a:prstGeom>
+          <a:noFill/>
+          <a:ln/>
+        </p:spPr>
+        <p:txBody>
+          <a:bodyPr wrap="square" lIns="0" tIns="0" rIns="0" bIns="0" rtlCol="0" anchor="t"/>
+          <a:lstStyle/>
+          <a:p>
+            <a:pPr indent="0" marL="0">
+              <a:buNone/>
+            </a:pPr>
+            <a:r>
+              <a:rPr lang="en-US" sz="1400" b="1" dirty="0">
+                <a:solidFill>
+                  <a:srgbClr val="FFFFFF"/>
+                </a:solidFill>
+                <a:latin typeface="Cambria" pitchFamily="34" charset="0"/>
+                <a:ea typeface="Cambria" pitchFamily="34" charset="-122"/>
+                <a:cs typeface="Cambria" pitchFamily="34" charset="-120"/>
+              </a:rPr>
+              <a:t>Programming spec</a:t>
+            </a:r>
+            <a:endParaRPr lang="en-US" sz="1400" dirty="0"/>
+          </a:p>
+        </p:txBody>
+      </p:sp>
+      <p:sp>
+        <p:nvSpPr>
+          <p:cNvPr id="13" name="Text 11"/>
+          <p:cNvSpPr/>
+          <p:nvPr/>
+        </p:nvSpPr>
+        <p:spPr>
+          <a:xfrm>
+            <a:off x="2542032" y="2889504"/>
+            <a:ext cx="1408176" cy="274320"/>
+          </a:xfrm>
+          <a:prstGeom prst="rect">
+            <a:avLst/>
+          </a:prstGeom>
+          <a:noFill/>
+          <a:ln/>
+        </p:spPr>
+        <p:txBody>
+          <a:bodyPr wrap="square" lIns="0" tIns="0" rIns="0" bIns="0" rtlCol="0" anchor="t"/>
+          <a:lstStyle/>
+          <a:p>
+            <a:pPr indent="0" marL="0">
+              <a:buNone/>
+            </a:pPr>
+            <a:r>
+              <a:rPr lang="en-US" sz="1050" dirty="0">
+                <a:solidFill>
+                  <a:srgbClr val="E3EDE7"/>
+                </a:solidFill>
+                <a:latin typeface="Calibri" pitchFamily="34" charset="0"/>
+                <a:ea typeface="Calibri" pitchFamily="34" charset="-122"/>
+                <a:cs typeface="Calibri" pitchFamily="34" charset="-120"/>
+              </a:rPr>
+              <a:t>TEA-SPEC-001</a:t>
+            </a:r>
+            <a:endParaRPr lang="en-US" sz="1050" dirty="0"/>
+          </a:p>
+        </p:txBody>
+      </p:sp>
+      <p:sp>
+        <p:nvSpPr>
+          <p:cNvPr id="14" name="Text 12"/>
+          <p:cNvSpPr/>
+          <p:nvPr/>
+        </p:nvSpPr>
+        <p:spPr>
+          <a:xfrm>
+            <a:off x="2542032" y="3200400"/>
+            <a:ext cx="1408176" cy="457200"/>
+          </a:xfrm>
+          <a:prstGeom prst="rect">
+            <a:avLst/>
+          </a:prstGeom>
+          <a:noFill/>
+          <a:ln/>
+        </p:spPr>
+        <p:txBody>
+          <a:bodyPr wrap="square" lIns="0" tIns="0" rIns="0" bIns="0" rtlCol="0" anchor="t"/>
+          <a:lstStyle/>
+          <a:p>
+            <a:pPr indent="0" marL="0">
+              <a:lnSpc>
+                <a:spcPts val="1300"/>
+              </a:lnSpc>
+              <a:buNone/>
+            </a:pPr>
+            <a:r>
+              <a:rPr lang="en-US" sz="1000" dirty="0">
+                <a:solidFill>
+                  <a:srgbClr val="8FC4A9"/>
+                </a:solidFill>
+                <a:latin typeface="Calibri" pitchFamily="34" charset="0"/>
+                <a:ea typeface="Calibri" pitchFamily="34" charset="-122"/>
+                <a:cs typeface="Calibri" pitchFamily="34" charset="-120"/>
+              </a:rPr>
+              <a:t>Approved 21 Aug</a:t>
+            </a:r>
+            <a:endParaRPr lang="en-US" sz="1000" dirty="0"/>
+          </a:p>
+        </p:txBody>
+      </p:sp>
+      <p:sp>
+        <p:nvSpPr>
+          <p:cNvPr id="15" name="Shape 13"/>
+          <p:cNvSpPr/>
+          <p:nvPr/>
+        </p:nvSpPr>
+        <p:spPr>
+          <a:xfrm>
+            <a:off x="4091940" y="2743200"/>
+            <a:ext cx="137160" cy="137160"/>
+          </a:xfrm>
+          <a:prstGeom prst="ellipse">
+            <a:avLst/>
+          </a:prstGeom>
+          <a:solidFill>
+            <a:srgbClr val="F7F8F5"/>
+          </a:solidFill>
+          <a:ln w="15875">
+            <a:solidFill>
+              <a:srgbClr val="1D4A3A"/>
+            </a:solidFill>
+            <a:prstDash val="solid"/>
+          </a:ln>
+        </p:spPr>
+      </p:sp>
+      <p:sp>
+        <p:nvSpPr>
+          <p:cNvPr id="16" name="Shape 14"/>
+          <p:cNvSpPr/>
+          <p:nvPr/>
+        </p:nvSpPr>
+        <p:spPr>
+          <a:xfrm>
+            <a:off x="4224528" y="1828800"/>
+            <a:ext cx="1700784" cy="1965960"/>
+          </a:xfrm>
+          <a:prstGeom prst="roundRect">
+            <a:avLst>
+              <a:gd name="adj" fmla="val 2688"/>
+            </a:avLst>
+          </a:prstGeom>
+          <a:solidFill>
             <a:srgbClr val="E3EDE7"/>
           </a:solidFill>
           <a:ln w="22225">
@@ -14825,13 +15043,13 @@
       </p:sp>
       <p:sp>
         <p:nvSpPr>
-          <p:cNvPr id="11" name="Text 9"/>
-          <p:cNvSpPr/>
-          <p:nvPr/>
-        </p:nvSpPr>
-        <p:spPr>
-          <a:xfrm>
-            <a:off x="2542032" y="1975104"/>
+          <p:cNvPr id="17" name="Text 15"/>
+          <p:cNvSpPr/>
+          <p:nvPr/>
+        </p:nvSpPr>
+        <p:spPr>
+          <a:xfrm>
+            <a:off x="4370832" y="1975104"/>
             <a:ext cx="1408176" cy="219456"/>
           </a:xfrm>
           <a:prstGeom prst="rect">
@@ -14856,7 +15074,7 @@
                 <a:ea typeface="Courier New" pitchFamily="34" charset="-122"/>
                 <a:cs typeface="Courier New" pitchFamily="34" charset="-120"/>
               </a:rPr>
-              <a:t>STEP 2</a:t>
+              <a:t>STEP 3</a:t>
             </a:r>
             <a:endParaRPr lang="en-US" sz="900" dirty="0"/>
           </a:p>
@@ -14864,13 +15082,13 @@
       </p:sp>
       <p:sp>
         <p:nvSpPr>
-          <p:cNvPr id="12" name="Text 10"/>
-          <p:cNvSpPr/>
-          <p:nvPr/>
-        </p:nvSpPr>
-        <p:spPr>
-          <a:xfrm>
-            <a:off x="2542032" y="2249424"/>
+          <p:cNvPr id="18" name="Text 16"/>
+          <p:cNvSpPr/>
+          <p:nvPr/>
+        </p:nvSpPr>
+        <p:spPr>
+          <a:xfrm>
+            <a:off x="4370832" y="2249424"/>
             <a:ext cx="1408176" cy="548640"/>
           </a:xfrm>
           <a:prstGeom prst="rect">
@@ -14895,7 +15113,7 @@
                 <a:ea typeface="Cambria" pitchFamily="34" charset="-122"/>
                 <a:cs typeface="Cambria" pitchFamily="34" charset="-120"/>
               </a:rPr>
-              <a:t>Programming spec</a:t>
+              <a:t>Prototype output</a:t>
             </a:r>
             <a:endParaRPr lang="en-US" sz="1400" dirty="0"/>
           </a:p>
@@ -14903,13 +15121,13 @@
       </p:sp>
       <p:sp>
         <p:nvSpPr>
-          <p:cNvPr id="13" name="Text 11"/>
-          <p:cNvSpPr/>
-          <p:nvPr/>
-        </p:nvSpPr>
-        <p:spPr>
-          <a:xfrm>
-            <a:off x="2542032" y="2889504"/>
+          <p:cNvPr id="19" name="Text 17"/>
+          <p:cNvSpPr/>
+          <p:nvPr/>
+        </p:nvSpPr>
+        <p:spPr>
+          <a:xfrm>
+            <a:off x="4370832" y="2889504"/>
             <a:ext cx="1408176" cy="274320"/>
           </a:xfrm>
           <a:prstGeom prst="rect">
@@ -14934,7 +15152,7 @@
                 <a:ea typeface="Calibri" pitchFamily="34" charset="-122"/>
                 <a:cs typeface="Calibri" pitchFamily="34" charset="-120"/>
               </a:rPr>
-              <a:t>TEA-SPEC-001</a:t>
+              <a:t>Dummy dataset</a:t>
             </a:r>
             <a:endParaRPr lang="en-US" sz="1050" dirty="0"/>
           </a:p>
@@ -14942,13 +15160,13 @@
       </p:sp>
       <p:sp>
         <p:nvSpPr>
-          <p:cNvPr id="14" name="Text 12"/>
-          <p:cNvSpPr/>
-          <p:nvPr/>
-        </p:nvSpPr>
-        <p:spPr>
-          <a:xfrm>
-            <a:off x="2542032" y="3200400"/>
+          <p:cNvPr id="20" name="Text 18"/>
+          <p:cNvSpPr/>
+          <p:nvPr/>
+        </p:nvSpPr>
+        <p:spPr>
+          <a:xfrm>
+            <a:off x="4370832" y="3200400"/>
             <a:ext cx="1408176" cy="457200"/>
           </a:xfrm>
           <a:prstGeom prst="rect">
@@ -14976,225 +15194,7 @@
                 <a:ea typeface="Calibri" pitchFamily="34" charset="-122"/>
                 <a:cs typeface="Calibri" pitchFamily="34" charset="-120"/>
               </a:rPr>
-              <a:t>Rules done; wording next</a:t>
-            </a:r>
-            <a:endParaRPr lang="en-US" sz="1000" dirty="0"/>
-          </a:p>
-        </p:txBody>
-      </p:sp>
-      <p:sp>
-        <p:nvSpPr>
-          <p:cNvPr id="15" name="Shape 13"/>
-          <p:cNvSpPr/>
-          <p:nvPr/>
-        </p:nvSpPr>
-        <p:spPr>
-          <a:xfrm>
-            <a:off x="4091940" y="2743200"/>
-            <a:ext cx="137160" cy="137160"/>
-          </a:xfrm>
-          <a:prstGeom prst="ellipse">
-            <a:avLst/>
-          </a:prstGeom>
-          <a:solidFill>
-            <a:srgbClr val="F7F8F5"/>
-          </a:solidFill>
-          <a:ln w="15875">
-            <a:solidFill>
-              <a:srgbClr val="1D4A3A"/>
-            </a:solidFill>
-            <a:prstDash val="solid"/>
-          </a:ln>
-        </p:spPr>
-      </p:sp>
-      <p:sp>
-        <p:nvSpPr>
-          <p:cNvPr id="16" name="Shape 14"/>
-          <p:cNvSpPr/>
-          <p:nvPr/>
-        </p:nvSpPr>
-        <p:spPr>
-          <a:xfrm>
-            <a:off x="4224528" y="1828800"/>
-            <a:ext cx="1700784" cy="1965960"/>
-          </a:xfrm>
-          <a:prstGeom prst="roundRect">
-            <a:avLst>
-              <a:gd name="adj" fmla="val 2688"/>
-            </a:avLst>
-          </a:prstGeom>
-          <a:solidFill>
-            <a:srgbClr val="FFFFFF"/>
-          </a:solidFill>
-          <a:ln w="12700">
-            <a:solidFill>
-              <a:srgbClr val="D4DAD2"/>
-            </a:solidFill>
-            <a:prstDash val="solid"/>
-          </a:ln>
-          <a:effectLst>
-            <a:outerShdw sx="100000" sy="100000" kx="0" ky="0" algn="bl" rotWithShape="0" blurRad="101600" dist="508" dir="5400000">
-              <a:srgbClr val="16201C">
-                <a:alpha val="10000"/>
-              </a:srgbClr>
-            </a:outerShdw>
-          </a:effectLst>
-        </p:spPr>
-      </p:sp>
-      <p:sp>
-        <p:nvSpPr>
-          <p:cNvPr id="17" name="Text 15"/>
-          <p:cNvSpPr/>
-          <p:nvPr/>
-        </p:nvSpPr>
-        <p:spPr>
-          <a:xfrm>
-            <a:off x="4370832" y="1975104"/>
-            <a:ext cx="1408176" cy="219456"/>
-          </a:xfrm>
-          <a:prstGeom prst="rect">
-            <a:avLst/>
-          </a:prstGeom>
-          <a:noFill/>
-          <a:ln/>
-        </p:spPr>
-        <p:txBody>
-          <a:bodyPr wrap="square" lIns="0" tIns="0" rIns="0" bIns="0" rtlCol="0" anchor="ctr"/>
-          <a:lstStyle/>
-          <a:p>
-            <a:pPr indent="0" marL="0">
-              <a:buNone/>
-            </a:pPr>
-            <a:r>
-              <a:rPr lang="en-US" sz="900" b="1" dirty="0">
-                <a:solidFill>
-                  <a:srgbClr val="5C665F"/>
-                </a:solidFill>
-                <a:latin typeface="Courier New" pitchFamily="34" charset="0"/>
-                <a:ea typeface="Courier New" pitchFamily="34" charset="-122"/>
-                <a:cs typeface="Courier New" pitchFamily="34" charset="-120"/>
-              </a:rPr>
-              <a:t>STEP 3</a:t>
-            </a:r>
-            <a:endParaRPr lang="en-US" sz="900" dirty="0"/>
-          </a:p>
-        </p:txBody>
-      </p:sp>
-      <p:sp>
-        <p:nvSpPr>
-          <p:cNvPr id="18" name="Text 16"/>
-          <p:cNvSpPr/>
-          <p:nvPr/>
-        </p:nvSpPr>
-        <p:spPr>
-          <a:xfrm>
-            <a:off x="4370832" y="2249424"/>
-            <a:ext cx="1408176" cy="548640"/>
-          </a:xfrm>
-          <a:prstGeom prst="rect">
-            <a:avLst/>
-          </a:prstGeom>
-          <a:noFill/>
-          <a:ln/>
-        </p:spPr>
-        <p:txBody>
-          <a:bodyPr wrap="square" lIns="0" tIns="0" rIns="0" bIns="0" rtlCol="0" anchor="t"/>
-          <a:lstStyle/>
-          <a:p>
-            <a:pPr indent="0" marL="0">
-              <a:buNone/>
-            </a:pPr>
-            <a:r>
-              <a:rPr lang="en-US" sz="1400" b="1" dirty="0">
-                <a:solidFill>
-                  <a:srgbClr val="16201C"/>
-                </a:solidFill>
-                <a:latin typeface="Cambria" pitchFamily="34" charset="0"/>
-                <a:ea typeface="Cambria" pitchFamily="34" charset="-122"/>
-                <a:cs typeface="Cambria" pitchFamily="34" charset="-120"/>
-              </a:rPr>
-              <a:t>Prototype output</a:t>
-            </a:r>
-            <a:endParaRPr lang="en-US" sz="1400" dirty="0"/>
-          </a:p>
-        </p:txBody>
-      </p:sp>
-      <p:sp>
-        <p:nvSpPr>
-          <p:cNvPr id="19" name="Text 17"/>
-          <p:cNvSpPr/>
-          <p:nvPr/>
-        </p:nvSpPr>
-        <p:spPr>
-          <a:xfrm>
-            <a:off x="4370832" y="2889504"/>
-            <a:ext cx="1408176" cy="274320"/>
-          </a:xfrm>
-          <a:prstGeom prst="rect">
-            <a:avLst/>
-          </a:prstGeom>
-          <a:noFill/>
-          <a:ln/>
-        </p:spPr>
-        <p:txBody>
-          <a:bodyPr wrap="square" lIns="0" tIns="0" rIns="0" bIns="0" rtlCol="0" anchor="t"/>
-          <a:lstStyle/>
-          <a:p>
-            <a:pPr indent="0" marL="0">
-              <a:buNone/>
-            </a:pPr>
-            <a:r>
-              <a:rPr lang="en-US" sz="1050" dirty="0">
-                <a:solidFill>
-                  <a:srgbClr val="5C665F"/>
-                </a:solidFill>
-                <a:latin typeface="Calibri" pitchFamily="34" charset="0"/>
-                <a:ea typeface="Calibri" pitchFamily="34" charset="-122"/>
-                <a:cs typeface="Calibri" pitchFamily="34" charset="-120"/>
-              </a:rPr>
-              <a:t>Dummy dataset</a:t>
-            </a:r>
-            <a:endParaRPr lang="en-US" sz="1050" dirty="0"/>
-          </a:p>
-        </p:txBody>
-      </p:sp>
-      <p:sp>
-        <p:nvSpPr>
-          <p:cNvPr id="20" name="Text 18"/>
-          <p:cNvSpPr/>
-          <p:nvPr/>
-        </p:nvSpPr>
-        <p:spPr>
-          <a:xfrm>
-            <a:off x="4370832" y="3200400"/>
-            <a:ext cx="1408176" cy="457200"/>
-          </a:xfrm>
-          <a:prstGeom prst="rect">
-            <a:avLst/>
-          </a:prstGeom>
-          <a:noFill/>
-          <a:ln/>
-        </p:spPr>
-        <p:txBody>
-          <a:bodyPr wrap="square" lIns="0" tIns="0" rIns="0" bIns="0" rtlCol="0" anchor="t"/>
-          <a:lstStyle/>
-          <a:p>
-            <a:pPr indent="0" marL="0">
-              <a:lnSpc>
-                <a:spcPts val="1300"/>
-              </a:lnSpc>
-              <a:buNone/>
-            </a:pPr>
-            <a:r>
-              <a:rPr lang="en-US" sz="1000" dirty="0">
-                <a:solidFill>
-                  <a:srgbClr val="5C665F"/>
-                </a:solidFill>
-                <a:latin typeface="Calibri" pitchFamily="34" charset="0"/>
-                <a:ea typeface="Calibri" pitchFamily="34" charset="-122"/>
-                <a:cs typeface="Calibri" pitchFamily="34" charset="-120"/>
-              </a:rPr>
-              <a:t>Findings read by humans</a:t>
+              <a:t>Next - needs a pilot study</a:t>
             </a:r>
             <a:endParaRPr lang="en-US" sz="1000" dirty="0"/>
           </a:p>

--- a/docs/concept/TEA-concept-overview.pptx
+++ b/docs/concept/TEA-concept-overview.pptx
@@ -2346,7 +2346,7 @@
         <p:spPr>
           <a:xfrm>
             <a:off x="5047488" y="4526280"/>
-            <a:ext cx="982980" cy="274320"/>
+            <a:ext cx="1078992" cy="274320"/>
           </a:xfrm>
           <a:prstGeom prst="roundRect">
             <a:avLst>
@@ -2379,7 +2379,7 @@
                 <a:ea typeface="Courier New" pitchFamily="34" charset="-122"/>
                 <a:cs typeface="Courier New" pitchFamily="34" charset="-120"/>
               </a:rPr>
-              <a:t>83 LIVE</a:t>
+              <a:t>GLM v5.2</a:t>
             </a:r>
             <a:endParaRPr lang="en-US" sz="900" dirty="0"/>
           </a:p>
@@ -2418,7 +2418,7 @@
                 <a:ea typeface="Courier New" pitchFamily="34" charset="-122"/>
                 <a:cs typeface="Courier New" pitchFamily="34" charset="-120"/>
               </a:rPr>
-              <a:t>Concept overview  ·  derived from TEA-PLAN-001 v1.0.0 and TEA-SPEC-001 v2.0.0</a:t>
+              <a:t>Concept overview  ·  derived from TEA-PLAN-001 v1.0.0 and TEA-SPEC-001 v2.1.0</a:t>
             </a:r>
             <a:endParaRPr lang="en-US" sz="900" dirty="0"/>
           </a:p>
@@ -11019,7 +11019,7 @@
                 <a:ea typeface="Courier New" pitchFamily="34" charset="-122"/>
                 <a:cs typeface="Courier New" pitchFamily="34" charset="-120"/>
               </a:rPr>
-              <a:t>WATCH AT STEP 3</a:t>
+              <a:t>ALSO OPEN</a:t>
             </a:r>
             <a:endParaRPr lang="en-US" sz="900" dirty="0"/>
           </a:p>
@@ -11061,7 +11061,7 @@
                 <a:ea typeface="Calibri" pitchFamily="34" charset="-122"/>
                 <a:cs typeface="Calibri" pitchFamily="34" charset="-120"/>
               </a:rPr>
-              <a:t>The 8 rules whose logic changed last have no test history, and 27 confidence rates are still estimates rather than measurements.</a:t>
+              <a:t>GLM v5.2 capability is assumed, not verified. The 32k prompt budget and structured-output behaviour were never checked against this model.</a:t>
             </a:r>
             <a:endParaRPr lang="en-US" sz="1200" dirty="0"/>
           </a:p>
@@ -13711,7 +13711,7 @@
                 <a:ea typeface="Calibri" pitchFamily="34" charset="-122"/>
                 <a:cs typeface="Calibri" pitchFamily="34" charset="-120"/>
               </a:rPr>
-              <a:t>Every number and every verdict comes from ordinary deterministic code. This single split is why the same verdicts come out of a commercial API and a locally hosted model, and why validation stays tractable.</a:t>
+              <a:t>Every number and every verdict comes from ordinary deterministic code. This single split is why the verdicts are identical whether GLM v5.2 answers, returns nonsense, or is switched off entirely - which is what keeps validation tractable.</a:t>
             </a:r>
             <a:endParaRPr lang="en-US" sz="1400" dirty="0"/>
           </a:p>
@@ -14041,7 +14041,7 @@
                 <a:ea typeface="Courier New" pitchFamily="34" charset="-122"/>
                 <a:cs typeface="Courier New" pitchFamily="34" charset="-120"/>
               </a:rPr>
-              <a:t>LLM-ASSISTED</a:t>
+              <a:t>GLM v5.2</a:t>
             </a:r>
             <a:endParaRPr lang="en-US" sz="900" dirty="0"/>
           </a:p>
@@ -14225,7 +14225,7 @@
                 <a:ea typeface="Calibri" pitchFamily="34" charset="-122"/>
                 <a:cs typeface="Calibri" pitchFamily="34" charset="-120"/>
               </a:rPr>
-              <a:t>If the model is unavailable the run still completes. Every LLM task has a deterministic template fallback - the findings get plainer, never wrong.</a:t>
+              <a:t>One model, company-hosted, no external LLM service. If GLM is unavailable the run still completes, and that same deterministic mode is the reference GLM is tested against.</a:t>
             </a:r>
             <a:endParaRPr lang="en-US" sz="1250" dirty="0"/>
           </a:p>
@@ -17795,7 +17795,7 @@
                 <a:ea typeface="Calibri" pitchFamily="34" charset="-122"/>
                 <a:cs typeface="Calibri" pitchFamily="34" charset="-120"/>
               </a:rPr>
-              <a:t>Plain outline = deterministic code   ·   Tinted + dashed = LLM-assisted   ·   Mixed dash = hybrid</a:t>
+              <a:t>Plain outline = deterministic code   ·   Tinted + dashed = GLM v5.2   ·   Mixed dash = hybrid</a:t>
             </a:r>
             <a:endParaRPr lang="en-US" sz="1150" dirty="0"/>
           </a:p>
